--- a/teaching/pavo-walkthrough.pptx
+++ b/teaching/pavo-walkthrough.pptx
@@ -13130,7 +13130,7 @@
                 </a:solidFill>
                 <a:latin typeface="Helvetica Neue"/>
               </a:rPr>
-              <a:t>•  Use whatever image source your group has been working with — FishView, FishBase, your own field photos, or the fallback folders in images/student-fish/&lt;your-lineage&gt;/.</a:t>
+              <a:t>•  Use whatever image source your group has been working with — FishView, FishBase, your own field photos, or the pre-loaded library at images/student-fish/&lt;your-lineage&gt;/, or images/student-images/ for fish you upload yourself.</a:t>
             </a:r>
           </a:p>
           <a:p>
@@ -14485,7 +14485,7 @@
                 </a:solidFill>
                 <a:latin typeface="Helvetica Neue"/>
               </a:rPr>
-              <a:t>Files: images/  •  scripts/walkthrough.R  •  lab-05-pavo-intro.qmd</a:t>
+              <a:t>Files: images/  •  scripts/walkthrough.R  •  scripts/helpers.R  •  lab-05-pavo-intro.qmd  •  student-guide.qmd</a:t>
             </a:r>
           </a:p>
         </p:txBody>
